--- a/ゲーム科2年/00_前期/ゲーム開発Ⅲ/ゲーム物理学/座学/19_ニュートンの運動の法則.pptx
+++ b/ゲーム科2年/00_前期/ゲーム開発Ⅲ/ゲーム物理学/座学/19_ニュートンの運動の法則.pptx
@@ -266,7 +266,7 @@
           <a:p>
             <a:fld id="{E9CC885B-4903-4D54-9A93-00025F12DED9}" type="datetimeFigureOut">
               <a:rPr kumimoji="1" lang="ja-JP" altLang="en-US" smtClean="0"/>
-              <a:t>2025/9/30</a:t>
+              <a:t>2025/11/7</a:t>
             </a:fld>
             <a:endParaRPr kumimoji="1" lang="ja-JP" altLang="en-US"/>
           </a:p>
@@ -496,7 +496,7 @@
           <a:p>
             <a:fld id="{E9CC885B-4903-4D54-9A93-00025F12DED9}" type="datetimeFigureOut">
               <a:rPr kumimoji="1" lang="ja-JP" altLang="en-US" smtClean="0"/>
-              <a:t>2025/9/30</a:t>
+              <a:t>2025/11/7</a:t>
             </a:fld>
             <a:endParaRPr kumimoji="1" lang="ja-JP" altLang="en-US"/>
           </a:p>
@@ -736,7 +736,7 @@
           <a:p>
             <a:fld id="{E9CC885B-4903-4D54-9A93-00025F12DED9}" type="datetimeFigureOut">
               <a:rPr kumimoji="1" lang="ja-JP" altLang="en-US" smtClean="0"/>
-              <a:t>2025/9/30</a:t>
+              <a:t>2025/11/7</a:t>
             </a:fld>
             <a:endParaRPr kumimoji="1" lang="ja-JP" altLang="en-US"/>
           </a:p>
@@ -966,7 +966,7 @@
           <a:p>
             <a:fld id="{E9CC885B-4903-4D54-9A93-00025F12DED9}" type="datetimeFigureOut">
               <a:rPr kumimoji="1" lang="ja-JP" altLang="en-US" smtClean="0"/>
-              <a:t>2025/9/30</a:t>
+              <a:t>2025/11/7</a:t>
             </a:fld>
             <a:endParaRPr kumimoji="1" lang="ja-JP" altLang="en-US"/>
           </a:p>
@@ -1241,7 +1241,7 @@
           <a:p>
             <a:fld id="{E9CC885B-4903-4D54-9A93-00025F12DED9}" type="datetimeFigureOut">
               <a:rPr kumimoji="1" lang="ja-JP" altLang="en-US" smtClean="0"/>
-              <a:t>2025/9/30</a:t>
+              <a:t>2025/11/7</a:t>
             </a:fld>
             <a:endParaRPr kumimoji="1" lang="ja-JP" altLang="en-US"/>
           </a:p>
@@ -1570,7 +1570,7 @@
           <a:p>
             <a:fld id="{E9CC885B-4903-4D54-9A93-00025F12DED9}" type="datetimeFigureOut">
               <a:rPr kumimoji="1" lang="ja-JP" altLang="en-US" smtClean="0"/>
-              <a:t>2025/9/30</a:t>
+              <a:t>2025/11/7</a:t>
             </a:fld>
             <a:endParaRPr kumimoji="1" lang="ja-JP" altLang="en-US"/>
           </a:p>
@@ -2046,7 +2046,7 @@
           <a:p>
             <a:fld id="{E9CC885B-4903-4D54-9A93-00025F12DED9}" type="datetimeFigureOut">
               <a:rPr kumimoji="1" lang="ja-JP" altLang="en-US" smtClean="0"/>
-              <a:t>2025/9/30</a:t>
+              <a:t>2025/11/7</a:t>
             </a:fld>
             <a:endParaRPr kumimoji="1" lang="ja-JP" altLang="en-US"/>
           </a:p>
@@ -2187,7 +2187,7 @@
           <a:p>
             <a:fld id="{E9CC885B-4903-4D54-9A93-00025F12DED9}" type="datetimeFigureOut">
               <a:rPr kumimoji="1" lang="ja-JP" altLang="en-US" smtClean="0"/>
-              <a:t>2025/9/30</a:t>
+              <a:t>2025/11/7</a:t>
             </a:fld>
             <a:endParaRPr kumimoji="1" lang="ja-JP" altLang="en-US"/>
           </a:p>
@@ -2300,7 +2300,7 @@
           <a:p>
             <a:fld id="{E9CC885B-4903-4D54-9A93-00025F12DED9}" type="datetimeFigureOut">
               <a:rPr kumimoji="1" lang="ja-JP" altLang="en-US" smtClean="0"/>
-              <a:t>2025/9/30</a:t>
+              <a:t>2025/11/7</a:t>
             </a:fld>
             <a:endParaRPr kumimoji="1" lang="ja-JP" altLang="en-US"/>
           </a:p>
@@ -2643,7 +2643,7 @@
           <a:p>
             <a:fld id="{E9CC885B-4903-4D54-9A93-00025F12DED9}" type="datetimeFigureOut">
               <a:rPr kumimoji="1" lang="ja-JP" altLang="en-US" smtClean="0"/>
-              <a:t>2025/9/30</a:t>
+              <a:t>2025/11/7</a:t>
             </a:fld>
             <a:endParaRPr kumimoji="1" lang="ja-JP" altLang="en-US"/>
           </a:p>
@@ -2931,7 +2931,7 @@
           <a:p>
             <a:fld id="{E9CC885B-4903-4D54-9A93-00025F12DED9}" type="datetimeFigureOut">
               <a:rPr kumimoji="1" lang="ja-JP" altLang="en-US" smtClean="0"/>
-              <a:t>2025/9/30</a:t>
+              <a:t>2025/11/7</a:t>
             </a:fld>
             <a:endParaRPr kumimoji="1" lang="ja-JP" altLang="en-US"/>
           </a:p>
@@ -3204,7 +3204,7 @@
           <a:p>
             <a:fld id="{E9CC885B-4903-4D54-9A93-00025F12DED9}" type="datetimeFigureOut">
               <a:rPr kumimoji="1" lang="ja-JP" altLang="en-US" smtClean="0"/>
-              <a:t>2025/9/30</a:t>
+              <a:t>2025/11/7</a:t>
             </a:fld>
             <a:endParaRPr kumimoji="1" lang="ja-JP" altLang="en-US"/>
           </a:p>
@@ -3848,8 +3848,8 @@
           </a:p>
         </p:txBody>
       </p:sp>
-      <mc:AlternateContent xmlns:mc="http://schemas.openxmlformats.org/markup-compatibility/2006">
-        <mc:Choice xmlns:a14="http://schemas.microsoft.com/office/drawing/2010/main" Requires="a14">
+      <mc:AlternateContent xmlns:mc="http://schemas.openxmlformats.org/markup-compatibility/2006" xmlns:a14="http://schemas.microsoft.com/office/drawing/2010/main">
+        <mc:Choice Requires="a14">
           <p:sp>
             <p:nvSpPr>
               <p:cNvPr id="6" name="テキスト ボックス 5">
@@ -4060,7 +4060,7 @@
             </p:txBody>
           </p:sp>
         </mc:Choice>
-        <mc:Fallback>
+        <mc:Fallback xmlns="">
           <p:sp>
             <p:nvSpPr>
               <p:cNvPr id="6" name="テキスト ボックス 5">
@@ -4174,8 +4174,8 @@
           </a:p>
         </p:txBody>
       </p:sp>
-      <mc:AlternateContent xmlns:mc="http://schemas.openxmlformats.org/markup-compatibility/2006">
-        <mc:Choice xmlns:a14="http://schemas.microsoft.com/office/drawing/2010/main" Requires="a14">
+      <mc:AlternateContent xmlns:mc="http://schemas.openxmlformats.org/markup-compatibility/2006" xmlns:a14="http://schemas.microsoft.com/office/drawing/2010/main">
+        <mc:Choice Requires="a14">
           <p:sp>
             <p:nvSpPr>
               <p:cNvPr id="6" name="テキスト ボックス 5">
@@ -4561,7 +4561,7 @@
             </p:txBody>
           </p:sp>
         </mc:Choice>
-        <mc:Fallback>
+        <mc:Fallback xmlns="">
           <p:sp>
             <p:nvSpPr>
               <p:cNvPr id="6" name="テキスト ボックス 5">
@@ -4726,8 +4726,8 @@
           </a:p>
         </p:txBody>
       </p:sp>
-      <mc:AlternateContent xmlns:mc="http://schemas.openxmlformats.org/markup-compatibility/2006">
-        <mc:Choice xmlns:a14="http://schemas.microsoft.com/office/drawing/2010/main" Requires="a14">
+      <mc:AlternateContent xmlns:mc="http://schemas.openxmlformats.org/markup-compatibility/2006" xmlns:a14="http://schemas.microsoft.com/office/drawing/2010/main">
+        <mc:Choice Requires="a14">
           <p:sp>
             <p:nvSpPr>
               <p:cNvPr id="6" name="テキスト ボックス 5">
@@ -4970,7 +4970,7 @@
             </p:txBody>
           </p:sp>
         </mc:Choice>
-        <mc:Fallback>
+        <mc:Fallback xmlns="">
           <p:sp>
             <p:nvSpPr>
               <p:cNvPr id="6" name="テキスト ボックス 5">
@@ -5084,8 +5084,8 @@
           </a:p>
         </p:txBody>
       </p:sp>
-      <mc:AlternateContent xmlns:mc="http://schemas.openxmlformats.org/markup-compatibility/2006">
-        <mc:Choice xmlns:a14="http://schemas.microsoft.com/office/drawing/2010/main" Requires="a14">
+      <mc:AlternateContent xmlns:mc="http://schemas.openxmlformats.org/markup-compatibility/2006" xmlns:a14="http://schemas.microsoft.com/office/drawing/2010/main">
+        <mc:Choice Requires="a14">
           <p:sp>
             <p:nvSpPr>
               <p:cNvPr id="6" name="テキスト ボックス 5">
@@ -5274,7 +5274,7 @@
                         <m:begChr m:val="["/>
                         <m:endChr m:val="]"/>
                         <m:ctrlPr>
-                          <a:rPr lang="en-US" altLang="ja-JP" sz="2400" b="0" i="0" smtClean="0">
+                          <a:rPr lang="en-US" altLang="ja-JP" sz="2400" b="0" i="1" smtClean="0">
                             <a:solidFill>
                               <a:schemeClr val="tx1"/>
                             </a:solidFill>
@@ -5617,7 +5617,7 @@
             </p:txBody>
           </p:sp>
         </mc:Choice>
-        <mc:Fallback>
+        <mc:Fallback xmlns="">
           <p:sp>
             <p:nvSpPr>
               <p:cNvPr id="6" name="テキスト ボックス 5">
@@ -5731,8 +5731,8 @@
           </a:p>
         </p:txBody>
       </p:sp>
-      <mc:AlternateContent xmlns:mc="http://schemas.openxmlformats.org/markup-compatibility/2006">
-        <mc:Choice xmlns:a14="http://schemas.microsoft.com/office/drawing/2010/main" Requires="a14">
+      <mc:AlternateContent xmlns:mc="http://schemas.openxmlformats.org/markup-compatibility/2006" xmlns:a14="http://schemas.microsoft.com/office/drawing/2010/main">
+        <mc:Choice Requires="a14">
           <p:sp>
             <p:nvSpPr>
               <p:cNvPr id="6" name="テキスト ボックス 5">
@@ -5937,31 +5937,19 @@
                       <a:rPr lang="en-US" altLang="ja-JP" sz="2400" b="0" i="1" smtClean="0">
                         <a:latin typeface="Cambria Math" panose="02040503050406030204" pitchFamily="18" charset="0"/>
                       </a:rPr>
-                      <m:t>=</m:t>
+                      <m:t>=0</m:t>
+                    </m:r>
+                    <m:r>
+                      <a:rPr lang="en-US" altLang="ja-JP" sz="2400" i="1">
+                        <a:latin typeface="Cambria Math" panose="02040503050406030204" pitchFamily="18" charset="0"/>
+                      </a:rPr>
+                      <m:t>×</m:t>
                     </m:r>
                     <m:r>
                       <a:rPr lang="en-US" altLang="ja-JP" sz="2400" b="0" i="1" smtClean="0">
                         <a:latin typeface="Cambria Math" panose="02040503050406030204" pitchFamily="18" charset="0"/>
                       </a:rPr>
-                      <m:t>0</m:t>
-                    </m:r>
-                    <m:r>
-                      <a:rPr lang="en-US" altLang="ja-JP" sz="2400" i="1">
-                        <a:latin typeface="Cambria Math" panose="02040503050406030204" pitchFamily="18" charset="0"/>
-                      </a:rPr>
-                      <m:t>×</m:t>
-                    </m:r>
-                    <m:r>
-                      <a:rPr lang="en-US" altLang="ja-JP" sz="2400" b="0" i="1" smtClean="0">
-                        <a:latin typeface="Cambria Math" panose="02040503050406030204" pitchFamily="18" charset="0"/>
-                      </a:rPr>
-                      <m:t>3</m:t>
-                    </m:r>
-                    <m:r>
-                      <a:rPr lang="en-US" altLang="ja-JP" sz="2400" b="0" i="1" smtClean="0">
-                        <a:latin typeface="Cambria Math" panose="02040503050406030204" pitchFamily="18" charset="0"/>
-                      </a:rPr>
-                      <m:t>+</m:t>
+                      <m:t>3+</m:t>
                     </m:r>
                     <m:f>
                       <m:fPr>
@@ -6066,13 +6054,7 @@
                           <a:rPr lang="en-US" altLang="ja-JP" sz="2400" b="0" i="1" smtClean="0">
                             <a:latin typeface="Cambria Math" panose="02040503050406030204" pitchFamily="18" charset="0"/>
                           </a:rPr>
-                          <m:t>(</m:t>
-                        </m:r>
-                        <m:r>
-                          <a:rPr lang="en-US" altLang="ja-JP" sz="2400" b="0" i="1" smtClean="0">
-                            <a:latin typeface="Cambria Math" panose="02040503050406030204" pitchFamily="18" charset="0"/>
-                          </a:rPr>
-                          <m:t>3</m:t>
+                          <m:t>(3</m:t>
                         </m:r>
                         <m:r>
                           <a:rPr lang="ja-JP" altLang="en-US" sz="2400" i="1">
@@ -6318,7 +6300,7 @@
             </p:txBody>
           </p:sp>
         </mc:Choice>
-        <mc:Fallback>
+        <mc:Fallback xmlns="">
           <p:sp>
             <p:nvSpPr>
               <p:cNvPr id="6" name="テキスト ボックス 5">
@@ -6686,7 +6668,7 @@
             <p:spPr>
               <a:xfrm>
                 <a:off x="567542" y="1216429"/>
-                <a:ext cx="10660291" cy="1938992"/>
+                <a:ext cx="10660291" cy="2308324"/>
               </a:xfrm>
               <a:prstGeom prst="rect">
                 <a:avLst/>
@@ -6814,6 +6796,27 @@
                 <a:r>
                   <a:rPr lang="ja-JP" altLang="en-US" sz="2400" dirty="0"/>
                   <a:t>で計算すること。</a:t>
+                </a:r>
+                <a:endParaRPr lang="en-US" altLang="ja-JP" sz="2400" dirty="0"/>
+              </a:p>
+              <a:p>
+                <a:r>
+                  <a:rPr lang="ja-JP" altLang="en-US" sz="2400" dirty="0"/>
+                  <a:t>また、金属と氷の運動摩擦係数は</a:t>
+                </a:r>
+                <a14:m>
+                  <m:oMath xmlns:m="http://schemas.openxmlformats.org/officeDocument/2006/math">
+                    <m:r>
+                      <a:rPr lang="en-US" altLang="ja-JP" sz="2400" i="1" dirty="0" smtClean="0">
+                        <a:latin typeface="Cambria Math" panose="02040503050406030204" pitchFamily="18" charset="0"/>
+                      </a:rPr>
+                      <m:t>0.1</m:t>
+                    </m:r>
+                  </m:oMath>
+                </a14:m>
+                <a:r>
+                  <a:rPr lang="ja-JP" altLang="en-US" sz="2400" dirty="0"/>
+                  <a:t>とする。</a:t>
                 </a:r>
                 <a:endParaRPr lang="en-US" altLang="ja-JP" sz="2400" dirty="0"/>
               </a:p>
@@ -6838,7 +6841,7 @@
             <p:spPr>
               <a:xfrm>
                 <a:off x="567542" y="1216429"/>
-                <a:ext cx="10660291" cy="1938992"/>
+                <a:ext cx="10660291" cy="2308324"/>
               </a:xfrm>
               <a:prstGeom prst="rect">
                 <a:avLst/>
@@ -6846,7 +6849,7 @@
               <a:blipFill>
                 <a:blip r:embed="rId2"/>
                 <a:stretch>
-                  <a:fillRect l="-858" t="-2516" b="-6289"/>
+                  <a:fillRect l="-858" t="-2116" b="-5291"/>
                 </a:stretch>
               </a:blipFill>
             </p:spPr>
